--- a/presentaion.pptx
+++ b/presentaion.pptx
@@ -2301,62 +2301,7 @@
                 <a:uFillTx/>
                 <a:latin typeface="Calibri Light"/>
               </a:rPr>
-              <a:t>Click </a:t>
-            </a:r>
-            <a:r>
-              <a:rPr b="1" lang="en-US" sz="4400" strike="noStrike" u="none">
-                <a:solidFill>
-                  <a:schemeClr val="dk1"/>
-                </a:solidFill>
-                <a:effectLst/>
-                <a:uFillTx/>
-                <a:latin typeface="Calibri Light"/>
-              </a:rPr>
-              <a:t>to </a:t>
-            </a:r>
-            <a:r>
-              <a:rPr b="1" lang="en-US" sz="4400" strike="noStrike" u="none">
-                <a:solidFill>
-                  <a:schemeClr val="dk1"/>
-                </a:solidFill>
-                <a:effectLst/>
-                <a:uFillTx/>
-                <a:latin typeface="Calibri Light"/>
-              </a:rPr>
-              <a:t>edit </a:t>
-            </a:r>
-            <a:r>
-              <a:rPr b="1" lang="en-US" sz="4400" strike="noStrike" u="none">
-                <a:solidFill>
-                  <a:schemeClr val="dk1"/>
-                </a:solidFill>
-                <a:effectLst/>
-                <a:uFillTx/>
-                <a:latin typeface="Calibri Light"/>
-              </a:rPr>
-              <a:t>Maste</a:t>
-            </a:r>
-            <a:r>
-              <a:rPr b="1" lang="en-US" sz="4400" strike="noStrike" u="none">
-                <a:solidFill>
-                  <a:schemeClr val="dk1"/>
-                </a:solidFill>
-                <a:effectLst/>
-                <a:uFillTx/>
-                <a:latin typeface="Calibri Light"/>
-              </a:rPr>
-              <a:t>r title </a:t>
-            </a:r>
-            <a:r>
-              <a:rPr b="1" lang="en-US" sz="4400" strike="noStrike" u="none">
-                <a:solidFill>
-                  <a:schemeClr val="dk1"/>
-                </a:solidFill>
-                <a:effectLst/>
-                <a:uFillTx/>
-                <a:latin typeface="Calibri Light"/>
-              </a:rPr>
-              <a:t>style</a:t>
+              <a:t>Click to edit Master title style</a:t>
             </a:r>
             <a:endParaRPr b="0" lang="en-US" sz="4400" strike="noStrike" u="none">
               <a:solidFill>
@@ -2841,84 +2786,7 @@
                 <a:uFillTx/>
                 <a:latin typeface="Calibri Light"/>
               </a:rPr>
-              <a:t>Clic</a:t>
-            </a:r>
-            <a:r>
-              <a:rPr b="0" lang="en-US" sz="6000" strike="noStrike" u="none">
-                <a:solidFill>
-                  <a:schemeClr val="dk1"/>
-                </a:solidFill>
-                <a:effectLst/>
-                <a:uFillTx/>
-                <a:latin typeface="Calibri Light"/>
-              </a:rPr>
-              <a:t>k to </a:t>
-            </a:r>
-            <a:r>
-              <a:rPr b="0" lang="en-US" sz="6000" strike="noStrike" u="none">
-                <a:solidFill>
-                  <a:schemeClr val="dk1"/>
-                </a:solidFill>
-                <a:effectLst/>
-                <a:uFillTx/>
-                <a:latin typeface="Calibri Light"/>
-              </a:rPr>
-              <a:t>edit </a:t>
-            </a:r>
-            <a:r>
-              <a:rPr b="0" lang="en-US" sz="6000" strike="noStrike" u="none">
-                <a:solidFill>
-                  <a:schemeClr val="dk1"/>
-                </a:solidFill>
-                <a:effectLst/>
-                <a:uFillTx/>
-                <a:latin typeface="Calibri Light"/>
-              </a:rPr>
-              <a:t>Mas</a:t>
-            </a:r>
-            <a:r>
-              <a:rPr b="0" lang="en-US" sz="6000" strike="noStrike" u="none">
-                <a:solidFill>
-                  <a:schemeClr val="dk1"/>
-                </a:solidFill>
-                <a:effectLst/>
-                <a:uFillTx/>
-                <a:latin typeface="Calibri Light"/>
-              </a:rPr>
-              <a:t>ter </a:t>
-            </a:r>
-            <a:r>
-              <a:rPr b="0" lang="en-US" sz="6000" strike="noStrike" u="none">
-                <a:solidFill>
-                  <a:schemeClr val="dk1"/>
-                </a:solidFill>
-                <a:effectLst/>
-                <a:uFillTx/>
-                <a:latin typeface="Calibri Light"/>
-              </a:rPr>
-              <a:t>title </a:t>
-            </a:r>
-            <a:r>
-              <a:rPr b="0" lang="en-US" sz="6000" strike="noStrike" u="none">
-                <a:solidFill>
-                  <a:schemeClr val="dk1"/>
-                </a:solidFill>
-                <a:effectLst/>
-                <a:uFillTx/>
-                <a:latin typeface="Calibri Light"/>
-              </a:rPr>
-              <a:t>styl</a:t>
-            </a:r>
-            <a:r>
-              <a:rPr b="0" lang="en-US" sz="6000" strike="noStrike" u="none">
-                <a:solidFill>
-                  <a:schemeClr val="dk1"/>
-                </a:solidFill>
-                <a:effectLst/>
-                <a:uFillTx/>
-                <a:latin typeface="Calibri Light"/>
-              </a:rPr>
-              <a:t>e</a:t>
+              <a:t>Click to edit Master title style</a:t>
             </a:r>
             <a:endParaRPr b="0" lang="en-US" sz="6000" strike="noStrike" u="none">
               <a:solidFill>
@@ -3952,51 +3820,7 @@
                 <a:uFillTx/>
                 <a:latin typeface="Calibri Light"/>
               </a:rPr>
-              <a:t>Click </a:t>
-            </a:r>
-            <a:r>
-              <a:rPr b="0" lang="en-US" sz="4400" strike="noStrike" u="none">
-                <a:solidFill>
-                  <a:schemeClr val="dk1"/>
-                </a:solidFill>
-                <a:effectLst/>
-                <a:uFillTx/>
-                <a:latin typeface="Calibri Light"/>
-              </a:rPr>
-              <a:t>to edit </a:t>
-            </a:r>
-            <a:r>
-              <a:rPr b="0" lang="en-US" sz="4400" strike="noStrike" u="none">
-                <a:solidFill>
-                  <a:schemeClr val="dk1"/>
-                </a:solidFill>
-                <a:effectLst/>
-                <a:uFillTx/>
-                <a:latin typeface="Calibri Light"/>
-              </a:rPr>
-              <a:t>Maste</a:t>
-            </a:r>
-            <a:r>
-              <a:rPr b="0" lang="en-US" sz="4400" strike="noStrike" u="none">
-                <a:solidFill>
-                  <a:schemeClr val="dk1"/>
-                </a:solidFill>
-                <a:effectLst/>
-                <a:uFillTx/>
-                <a:latin typeface="Calibri Light"/>
-              </a:rPr>
-              <a:t>r title </a:t>
-            </a:r>
-            <a:r>
-              <a:rPr b="0" lang="en-US" sz="4400" strike="noStrike" u="none">
-                <a:solidFill>
-                  <a:schemeClr val="dk1"/>
-                </a:solidFill>
-                <a:effectLst/>
-                <a:uFillTx/>
-                <a:latin typeface="Calibri Light"/>
-              </a:rPr>
-              <a:t>style</a:t>
+              <a:t>Click to edit Master title style</a:t>
             </a:r>
             <a:endParaRPr b="0" lang="en-US" sz="4400" strike="noStrike" u="none">
               <a:solidFill>
@@ -4800,51 +4624,7 @@
                 <a:uFillTx/>
                 <a:latin typeface="Calibri Light"/>
               </a:rPr>
-              <a:t>Click </a:t>
-            </a:r>
-            <a:r>
-              <a:rPr b="0" lang="en-US" sz="4400" strike="noStrike" u="none">
-                <a:solidFill>
-                  <a:schemeClr val="dk1"/>
-                </a:solidFill>
-                <a:effectLst/>
-                <a:uFillTx/>
-                <a:latin typeface="Calibri Light"/>
-              </a:rPr>
-              <a:t>to edit </a:t>
-            </a:r>
-            <a:r>
-              <a:rPr b="0" lang="en-US" sz="4400" strike="noStrike" u="none">
-                <a:solidFill>
-                  <a:schemeClr val="dk1"/>
-                </a:solidFill>
-                <a:effectLst/>
-                <a:uFillTx/>
-                <a:latin typeface="Calibri Light"/>
-              </a:rPr>
-              <a:t>Maste</a:t>
-            </a:r>
-            <a:r>
-              <a:rPr b="0" lang="en-US" sz="4400" strike="noStrike" u="none">
-                <a:solidFill>
-                  <a:schemeClr val="dk1"/>
-                </a:solidFill>
-                <a:effectLst/>
-                <a:uFillTx/>
-                <a:latin typeface="Calibri Light"/>
-              </a:rPr>
-              <a:t>r title </a:t>
-            </a:r>
-            <a:r>
-              <a:rPr b="0" lang="en-US" sz="4400" strike="noStrike" u="none">
-                <a:solidFill>
-                  <a:schemeClr val="dk1"/>
-                </a:solidFill>
-                <a:effectLst/>
-                <a:uFillTx/>
-                <a:latin typeface="Calibri Light"/>
-              </a:rPr>
-              <a:t>style</a:t>
+              <a:t>Click to edit Master title style</a:t>
             </a:r>
             <a:endParaRPr b="0" lang="en-US" sz="4400" strike="noStrike" u="none">
               <a:solidFill>
@@ -5652,8 +5432,8 @@
         </p:nvSpPr>
         <p:spPr>
           <a:xfrm>
-            <a:off x="7092360" y="2722320"/>
-            <a:ext cx="3364560" cy="1005120"/>
+            <a:off x="7092360" y="1977480"/>
+            <a:ext cx="3364560" cy="2196000"/>
           </a:xfrm>
           <a:prstGeom prst="rect">
             <a:avLst/>
@@ -5696,7 +5476,39 @@
               </a:rPr>
               <a:t>Introduction to Traceability in Industry 4.0</a:t>
             </a:r>
-            <a:endParaRPr b="1" lang="en-US" sz="2000" strike="noStrike" u="none">
+            <a:endParaRPr b="0" lang="en-US" sz="2000" strike="noStrike" u="none">
+              <a:solidFill>
+                <a:srgbClr val="000000"/>
+              </a:solidFill>
+              <a:effectLst/>
+              <a:uFillTx/>
+              <a:latin typeface="Roboto"/>
+            </a:endParaRPr>
+          </a:p>
+          <a:p>
+            <a:pPr defTabSz="914400">
+              <a:lnSpc>
+                <a:spcPct val="100000"/>
+              </a:lnSpc>
+              <a:spcBef>
+                <a:spcPts val="1191"/>
+              </a:spcBef>
+              <a:spcAft>
+                <a:spcPts val="992"/>
+              </a:spcAft>
+            </a:pPr>
+            <a:r>
+              <a:rPr b="0" lang="en-US" sz="2000" strike="noStrike" u="none">
+                <a:solidFill>
+                  <a:schemeClr val="lt1"/>
+                </a:solidFill>
+                <a:effectLst/>
+                <a:uFillTx/>
+                <a:latin typeface="Source Sans Pro"/>
+              </a:rPr>
+              <a:t>Intelligent Systems for Supply Chain Management</a:t>
+            </a:r>
+            <a:endParaRPr b="0" lang="en-US" sz="2000" strike="noStrike" u="none">
               <a:solidFill>
                 <a:srgbClr val="000000"/>
               </a:solidFill>
@@ -5912,7 +5724,7 @@
                 <a:spcPct val="100000"/>
               </a:lnSpc>
             </a:pPr>
-            <a:fld id="{B6D91D4D-15B5-4635-A96E-0C302FDD0C5F}" type="slidenum">
+            <a:fld id="{A6A6E38F-3BCA-485F-859D-0A1D1B6395DC}" type="slidenum">
               <a:rPr b="0" lang="ru-RU" sz="1800" strike="noStrike" u="none">
                 <a:solidFill>
                   <a:schemeClr val="lt1"/>
@@ -6844,7 +6656,7 @@
                 <a:spcPct val="100000"/>
               </a:lnSpc>
             </a:pPr>
-            <a:fld id="{9EF3F373-C467-44ED-AF29-E8BA5498F370}" type="slidenum">
+            <a:fld id="{DB956DA1-4956-4678-93B5-89CF73BD090D}" type="slidenum">
               <a:rPr b="0" lang="ru-RU" sz="1800" strike="noStrike" u="none">
                 <a:ln>
                   <a:solidFill>
@@ -7277,7 +7089,7 @@
                 <a:spcPct val="100000"/>
               </a:lnSpc>
             </a:pPr>
-            <a:fld id="{CD1EDAAF-B343-4C6B-A179-BF2381A51C58}" type="slidenum">
+            <a:fld id="{9A0DAD1D-931E-47E3-8A32-99B5CC61471B}" type="slidenum">
               <a:rPr b="0" lang="ru-RU" sz="1800" strike="noStrike" u="none">
                 <a:ln>
                   <a:solidFill>
@@ -7395,6 +7207,12 @@
               <a:lnSpc>
                 <a:spcPct val="100000"/>
               </a:lnSpc>
+              <a:spcBef>
+                <a:spcPts val="1191"/>
+              </a:spcBef>
+              <a:spcAft>
+                <a:spcPts val="992"/>
+              </a:spcAft>
             </a:pPr>
             <a:r>
               <a:rPr b="1" lang="en-US" sz="1800" strike="noStrike" u="none">
@@ -7405,7 +7223,18 @@
                 <a:uFillTx/>
                 <a:latin typeface="Source Sans Pro"/>
               </a:rPr>
-              <a:t>The Challenge: Determinism vs. Uncertainty</a:t>
+              <a:t>Why is intelligent traceability needed?</a:t>
+            </a:r>
+            <a:r>
+              <a:rPr b="0" lang="en-US" sz="1800" strike="noStrike" u="none">
+                <a:solidFill>
+                  <a:schemeClr val="dk1"/>
+                </a:solidFill>
+                <a:effectLst/>
+                <a:uFillTx/>
+                <a:latin typeface="Source Sans Pro"/>
+              </a:rPr>
+              <a:t>:</a:t>
             </a:r>
             <a:endParaRPr b="0" lang="en-US" sz="1800" strike="noStrike" u="none">
               <a:solidFill>
@@ -7417,47 +7246,16 @@
             </a:endParaRPr>
           </a:p>
           <a:p>
-            <a:pPr defTabSz="914400">
+            <a:pPr marL="285840" indent="-285840" defTabSz="914400">
               <a:lnSpc>
                 <a:spcPct val="100000"/>
               </a:lnSpc>
-            </a:pPr>
-            <a:r>
-              <a:rPr b="1" lang="en-US" sz="1800" strike="noStrike" u="none">
-                <a:solidFill>
-                  <a:schemeClr val="dk1"/>
-                </a:solidFill>
-                <a:effectLst/>
-                <a:uFillTx/>
-                <a:latin typeface="Source Sans Pro"/>
-              </a:rPr>
-              <a:t>The Mismatch</a:t>
-            </a:r>
-            <a:r>
-              <a:rPr b="0" lang="en-US" sz="1800" strike="noStrike" u="none">
-                <a:solidFill>
-                  <a:schemeClr val="dk1"/>
-                </a:solidFill>
-                <a:effectLst/>
-                <a:uFillTx/>
-                <a:latin typeface="Source Sans Pro"/>
-              </a:rPr>
-              <a:t>:</a:t>
-            </a:r>
-            <a:endParaRPr b="0" lang="en-US" sz="1800" strike="noStrike" u="none">
-              <a:solidFill>
-                <a:srgbClr val="000000"/>
-              </a:solidFill>
-              <a:effectLst/>
-              <a:uFillTx/>
-              <a:latin typeface="Roboto"/>
-            </a:endParaRPr>
-          </a:p>
-          <a:p>
-            <a:pPr marL="285840" indent="-285840" defTabSz="914400">
-              <a:lnSpc>
-                <a:spcPct val="100000"/>
-              </a:lnSpc>
+              <a:spcBef>
+                <a:spcPts val="1191"/>
+              </a:spcBef>
+              <a:spcAft>
+                <a:spcPts val="992"/>
+              </a:spcAft>
               <a:buClr>
                 <a:srgbClr val="000000"/>
               </a:buClr>
@@ -7465,7 +7263,7 @@
               <a:buChar char="•"/>
             </a:pPr>
             <a:r>
-              <a:rPr b="1" lang="en-US" sz="1800" strike="noStrike" u="none">
+              <a:rPr b="0" lang="en-US" sz="1800" strike="noStrike" u="none">
                 <a:solidFill>
                   <a:schemeClr val="dk1"/>
                 </a:solidFill>
@@ -7473,18 +7271,7 @@
                 <a:uFillTx/>
                 <a:latin typeface="Source Sans Pro"/>
               </a:rPr>
-              <a:t>Traditional Real-Time (RT) Systems: </a:t>
-            </a:r>
-            <a:r>
-              <a:rPr b="0" lang="en-US" sz="1800" strike="noStrike" u="none">
-                <a:solidFill>
-                  <a:schemeClr val="dk1"/>
-                </a:solidFill>
-                <a:effectLst/>
-                <a:uFillTx/>
-                <a:latin typeface="Source Sans Pro"/>
-              </a:rPr>
-              <a:t>Assumed to be deterministic;</a:t>
+              <a:t>Industry 4.0 generates massive heterogeneous data (IoT, sensors, CPS)</a:t>
             </a:r>
             <a:endParaRPr b="0" lang="en-US" sz="1800" strike="noStrike" u="none">
               <a:solidFill>
@@ -7500,6 +7287,12 @@
               <a:lnSpc>
                 <a:spcPct val="100000"/>
               </a:lnSpc>
+              <a:spcBef>
+                <a:spcPts val="1191"/>
+              </a:spcBef>
+              <a:spcAft>
+                <a:spcPts val="992"/>
+              </a:spcAft>
               <a:buClr>
                 <a:srgbClr val="000000"/>
               </a:buClr>
@@ -7507,7 +7300,7 @@
               <a:buChar char="•"/>
             </a:pPr>
             <a:r>
-              <a:rPr b="1" lang="en-US" sz="1800" strike="noStrike" u="none">
+              <a:rPr b="0" lang="en-US" sz="1800" strike="noStrike" u="none">
                 <a:solidFill>
                   <a:schemeClr val="dk1"/>
                 </a:solidFill>
@@ -7515,18 +7308,7 @@
                 <a:uFillTx/>
                 <a:latin typeface="Source Sans Pro"/>
               </a:rPr>
-              <a:t>Real-World Environment:</a:t>
-            </a:r>
-            <a:r>
-              <a:rPr b="0" lang="en-US" sz="1800" strike="noStrike" u="none">
-                <a:solidFill>
-                  <a:schemeClr val="dk1"/>
-                </a:solidFill>
-                <a:effectLst/>
-                <a:uFillTx/>
-                <a:latin typeface="Source Sans Pro"/>
-              </a:rPr>
-              <a:t> Is uncertain (sensor noise, variable delays, unpredictable events);</a:t>
+              <a:t>Supply chains lack real-time transparency and safety assurance</a:t>
             </a:r>
             <a:endParaRPr b="0" lang="en-US" sz="1800" strike="noStrike" u="none">
               <a:solidFill>
@@ -7542,6 +7324,12 @@
               <a:lnSpc>
                 <a:spcPct val="100000"/>
               </a:lnSpc>
+              <a:spcBef>
+                <a:spcPts val="1191"/>
+              </a:spcBef>
+              <a:spcAft>
+                <a:spcPts val="992"/>
+              </a:spcAft>
               <a:buClr>
                 <a:srgbClr val="000000"/>
               </a:buClr>
@@ -7549,7 +7337,7 @@
               <a:buChar char="•"/>
             </a:pPr>
             <a:r>
-              <a:rPr b="1" lang="en-US" sz="1800" strike="noStrike" u="none">
+              <a:rPr b="0" lang="en-US" sz="1800" strike="noStrike" u="none">
                 <a:solidFill>
                   <a:schemeClr val="dk1"/>
                 </a:solidFill>
@@ -7557,8 +7345,34 @@
                 <a:uFillTx/>
                 <a:latin typeface="Source Sans Pro"/>
               </a:rPr>
-              <a:t>Result</a:t>
-            </a:r>
+              <a:t>Current systems cannot integrate data from multiple sources</a:t>
+            </a:r>
+            <a:endParaRPr b="0" lang="en-US" sz="1800" strike="noStrike" u="none">
+              <a:solidFill>
+                <a:srgbClr val="000000"/>
+              </a:solidFill>
+              <a:effectLst/>
+              <a:uFillTx/>
+              <a:latin typeface="Roboto"/>
+            </a:endParaRPr>
+          </a:p>
+          <a:p>
+            <a:pPr marL="285840" indent="-285840" defTabSz="914400">
+              <a:lnSpc>
+                <a:spcPct val="100000"/>
+              </a:lnSpc>
+              <a:spcBef>
+                <a:spcPts val="1191"/>
+              </a:spcBef>
+              <a:spcAft>
+                <a:spcPts val="992"/>
+              </a:spcAft>
+              <a:buClr>
+                <a:srgbClr val="000000"/>
+              </a:buClr>
+              <a:buFont typeface="Arial"/>
+              <a:buChar char="•"/>
+            </a:pPr>
             <a:r>
               <a:rPr b="0" lang="en-US" sz="1800" strike="noStrike" u="none">
                 <a:solidFill>
@@ -7568,133 +7382,7 @@
                 <a:uFillTx/>
                 <a:latin typeface="Source Sans Pro"/>
               </a:rPr>
-              <a:t>: Hard timing guarantees (deadlines) conflict with the need to handle probabilities</a:t>
-            </a:r>
-            <a:endParaRPr b="0" lang="en-US" sz="1800" strike="noStrike" u="none">
-              <a:solidFill>
-                <a:srgbClr val="000000"/>
-              </a:solidFill>
-              <a:effectLst/>
-              <a:uFillTx/>
-              <a:latin typeface="Roboto"/>
-            </a:endParaRPr>
-          </a:p>
-          <a:p>
-            <a:pPr defTabSz="914400">
-              <a:lnSpc>
-                <a:spcPct val="100000"/>
-              </a:lnSpc>
-              <a:tabLst>
-                <a:tab algn="l" pos="0"/>
-              </a:tabLst>
-            </a:pPr>
-            <a:r>
-              <a:rPr b="1" lang="en-US" sz="1800" strike="noStrike" u="none">
-                <a:solidFill>
-                  <a:schemeClr val="dk1"/>
-                </a:solidFill>
-                <a:effectLst/>
-                <a:uFillTx/>
-                <a:latin typeface="Source Sans Pro"/>
-              </a:rPr>
-              <a:t>Presentation Goal</a:t>
-            </a:r>
-            <a:endParaRPr b="0" lang="en-US" sz="1800" strike="noStrike" u="none">
-              <a:solidFill>
-                <a:srgbClr val="000000"/>
-              </a:solidFill>
-              <a:effectLst/>
-              <a:uFillTx/>
-              <a:latin typeface="Roboto"/>
-            </a:endParaRPr>
-          </a:p>
-          <a:p>
-            <a:pPr defTabSz="914400">
-              <a:lnSpc>
-                <a:spcPct val="100000"/>
-              </a:lnSpc>
-              <a:tabLst>
-                <a:tab algn="l" pos="0"/>
-              </a:tabLst>
-            </a:pPr>
-            <a:r>
-              <a:rPr b="0" lang="en-US" sz="1800" strike="noStrike" u="none">
-                <a:solidFill>
-                  <a:schemeClr val="dk1"/>
-                </a:solidFill>
-                <a:effectLst/>
-                <a:uFillTx/>
-                <a:latin typeface="Source Sans Pro"/>
-              </a:rPr>
-              <a:t>Introduce Real-Time Probabilistic Programming (RTPP) – a framework that:</a:t>
-            </a:r>
-            <a:endParaRPr b="0" lang="en-US" sz="1800" strike="noStrike" u="none">
-              <a:solidFill>
-                <a:srgbClr val="000000"/>
-              </a:solidFill>
-              <a:effectLst/>
-              <a:uFillTx/>
-              <a:latin typeface="Roboto"/>
-            </a:endParaRPr>
-          </a:p>
-          <a:p>
-            <a:pPr marL="343080" indent="-343080" defTabSz="914400">
-              <a:lnSpc>
-                <a:spcPct val="100000"/>
-              </a:lnSpc>
-              <a:buClr>
-                <a:srgbClr val="000000"/>
-              </a:buClr>
-              <a:buFont typeface="Calibri Light"/>
-              <a:buAutoNum type="arabicPeriod"/>
-              <a:tabLst>
-                <a:tab algn="l" pos="0"/>
-              </a:tabLst>
-            </a:pPr>
-            <a:r>
-              <a:rPr b="0" lang="en-US" sz="1800" strike="noStrike" u="none">
-                <a:solidFill>
-                  <a:schemeClr val="dk1"/>
-                </a:solidFill>
-                <a:effectLst/>
-                <a:uFillTx/>
-                <a:latin typeface="Source Sans Pro"/>
-              </a:rPr>
-              <a:t>Explicitly models uncertainty using probability distributions;</a:t>
-            </a:r>
-            <a:endParaRPr b="0" lang="en-US" sz="1800" strike="noStrike" u="none">
-              <a:solidFill>
-                <a:srgbClr val="000000"/>
-              </a:solidFill>
-              <a:effectLst/>
-              <a:uFillTx/>
-              <a:latin typeface="Roboto"/>
-            </a:endParaRPr>
-          </a:p>
-          <a:p>
-            <a:pPr marL="343080" indent="-343080" defTabSz="914400">
-              <a:lnSpc>
-                <a:spcPct val="100000"/>
-              </a:lnSpc>
-              <a:buClr>
-                <a:srgbClr val="000000"/>
-              </a:buClr>
-              <a:buFont typeface="Calibri Light"/>
-              <a:buAutoNum type="arabicPeriod"/>
-              <a:tabLst>
-                <a:tab algn="l" pos="0"/>
-              </a:tabLst>
-            </a:pPr>
-            <a:r>
-              <a:rPr b="0" lang="en-US" sz="1800" strike="noStrike" u="none">
-                <a:solidFill>
-                  <a:schemeClr val="dk1"/>
-                </a:solidFill>
-                <a:effectLst/>
-                <a:uFillTx/>
-                <a:latin typeface="Source Sans Pro"/>
-              </a:rPr>
-              <a:t>Guarantees that all computations respect strict timing constraints</a:t>
+              <a:t>Goal: Create unified, intelligent traceability for product safety</a:t>
             </a:r>
             <a:endParaRPr b="0" lang="en-US" sz="1800" strike="noStrike" u="none">
               <a:solidFill>
@@ -7772,7 +7460,7 @@
                 <a:spcPct val="100000"/>
               </a:lnSpc>
             </a:pPr>
-            <a:fld id="{A17CEB30-4F70-4E59-98FD-BF1DF4E52635}" type="slidenum">
+            <a:fld id="{BFA901F7-FE96-4101-A89D-662352C06BCB}" type="slidenum">
               <a:rPr b="0" lang="ru-RU" sz="1800" strike="noStrike" u="none">
                 <a:ln>
                   <a:solidFill>
@@ -7808,7 +7496,7 @@
         <p:spPr>
           <a:xfrm>
             <a:off x="2536200" y="330120"/>
-            <a:ext cx="7119720" cy="398520"/>
+            <a:ext cx="7119720" cy="395280"/>
           </a:xfrm>
           <a:prstGeom prst="rect">
             <a:avLst/>
@@ -7833,6 +7521,12 @@
               <a:lnSpc>
                 <a:spcPct val="100000"/>
               </a:lnSpc>
+              <a:spcBef>
+                <a:spcPts val="1191"/>
+              </a:spcBef>
+              <a:spcAft>
+                <a:spcPts val="992"/>
+              </a:spcAft>
             </a:pPr>
             <a:r>
               <a:rPr b="0" lang="en-US" sz="2000" strike="noStrike" u="none">
@@ -7843,9 +7537,9 @@
                 <a:uFillTx/>
                 <a:latin typeface="Source Sans Pro"/>
               </a:rPr>
-              <a:t>CORE IDEA: PROBALITY ON DEADLINE</a:t>
-            </a:r>
-            <a:endParaRPr b="0" lang="en-US" sz="2000" strike="noStrike" u="none">
+              <a:t>CORE IDEA: THREE-LAYER ARCHITECTURE</a:t>
+            </a:r>
+            <a:endParaRPr b="1" lang="en-US" sz="2000" strike="noStrike" u="none">
               <a:solidFill>
                 <a:srgbClr val="000000"/>
               </a:solidFill>
@@ -7984,7 +7678,7 @@
                 <a:spcPct val="100000"/>
               </a:lnSpc>
             </a:pPr>
-            <a:fld id="{A96B55ED-1DED-4157-98BC-E965DD2ABE5E}" type="slidenum">
+            <a:fld id="{5B3376FF-C172-4979-BCEE-AD6F959D62F9}" type="slidenum">
               <a:rPr b="0" lang="ru-RU" sz="1800" strike="noStrike" u="none">
                 <a:ln>
                   <a:solidFill>
@@ -8020,7 +7714,7 @@
         <p:spPr>
           <a:xfrm>
             <a:off x="1130400" y="308520"/>
-            <a:ext cx="9930960" cy="398520"/>
+            <a:ext cx="9930960" cy="395280"/>
           </a:xfrm>
           <a:prstGeom prst="rect">
             <a:avLst/>
@@ -8045,6 +7739,12 @@
               <a:lnSpc>
                 <a:spcPct val="100000"/>
               </a:lnSpc>
+              <a:spcBef>
+                <a:spcPts val="1191"/>
+              </a:spcBef>
+              <a:spcAft>
+                <a:spcPts val="992"/>
+              </a:spcAft>
             </a:pPr>
             <a:r>
               <a:rPr b="0" lang="en-US" sz="2000" strike="noStrike" u="none">
@@ -8055,9 +7755,9 @@
                 <a:uFillTx/>
                 <a:latin typeface="Source Sans Pro"/>
               </a:rPr>
-              <a:t>BAYESIAN INFERENCE IN REAL-TIME</a:t>
-            </a:r>
-            <a:endParaRPr b="0" lang="en-US" sz="2000" strike="noStrike" u="none">
+              <a:t>System Architecture: Ontology-Based Modeling</a:t>
+            </a:r>
+            <a:endParaRPr b="1" lang="en-US" sz="2000" strike="noStrike" u="none">
               <a:solidFill>
                 <a:srgbClr val="000000"/>
               </a:solidFill>
@@ -8196,7 +7896,7 @@
                 <a:spcPct val="100000"/>
               </a:lnSpc>
             </a:pPr>
-            <a:fld id="{280C7F38-A6D0-463E-B51B-0952429F2040}" type="slidenum">
+            <a:fld id="{167D559E-70F0-4CEC-8D69-C1291FD295FF}" type="slidenum">
               <a:rPr b="0" lang="ru-RU" sz="1800" strike="noStrike" u="none">
                 <a:ln>
                   <a:solidFill>
@@ -8735,7 +8435,7 @@
                 <a:spcPct val="100000"/>
               </a:lnSpc>
             </a:pPr>
-            <a:fld id="{E6F8FF95-E94B-4A2F-AF04-28D88E2A0EDF}" type="slidenum">
+            <a:fld id="{ADF28767-6A0C-4CEB-8483-38D532D4DB94}" type="slidenum">
               <a:rPr b="0" lang="ru-RU" sz="1800" strike="noStrike" u="none">
                 <a:ln>
                   <a:solidFill>
@@ -12635,7 +12335,7 @@
                 <a:spcPct val="100000"/>
               </a:lnSpc>
             </a:pPr>
-            <a:fld id="{3007D09D-C2A5-45B7-8321-E9F4539E1789}" type="slidenum">
+            <a:fld id="{A0D2AE8A-877F-4C3F-9C3B-AF4C39A58AC6}" type="slidenum">
               <a:rPr b="0" lang="ru-RU" sz="1800" strike="noStrike" u="none">
                 <a:solidFill>
                   <a:schemeClr val="lt1"/>
